--- a/03.三角比/03_三角比.pptx
+++ b/03.三角比/03_三角比.pptx
@@ -3930,7 +3930,7 @@
           <a:p>
             <a:fld id="{6510BEAB-1E3E-438B-AAE1-0A855D360075}" type="datetimeFigureOut">
               <a:rPr kumimoji="1" lang="ja-JP" altLang="en-US" smtClean="0"/>
-              <a:t>2026/5/6</a:t>
+              <a:t>2026/5/7</a:t>
             </a:fld>
             <a:endParaRPr kumimoji="1" lang="ja-JP" altLang="en-US"/>
           </a:p>
@@ -4487,7 +4487,7 @@
           <a:p>
             <a:fld id="{61FE3999-FCFF-407F-9A7B-E154C26CB6C5}" type="datetimeFigureOut">
               <a:rPr kumimoji="1" lang="ja-JP" altLang="en-US" smtClean="0"/>
-              <a:t>2026/5/6</a:t>
+              <a:t>2026/5/7</a:t>
             </a:fld>
             <a:endParaRPr kumimoji="1" lang="ja-JP" altLang="en-US"/>
           </a:p>
@@ -4717,7 +4717,7 @@
           <a:p>
             <a:fld id="{61FE3999-FCFF-407F-9A7B-E154C26CB6C5}" type="datetimeFigureOut">
               <a:rPr kumimoji="1" lang="ja-JP" altLang="en-US" smtClean="0"/>
-              <a:t>2026/5/6</a:t>
+              <a:t>2026/5/7</a:t>
             </a:fld>
             <a:endParaRPr kumimoji="1" lang="ja-JP" altLang="en-US"/>
           </a:p>
@@ -4957,7 +4957,7 @@
           <a:p>
             <a:fld id="{61FE3999-FCFF-407F-9A7B-E154C26CB6C5}" type="datetimeFigureOut">
               <a:rPr kumimoji="1" lang="ja-JP" altLang="en-US" smtClean="0"/>
-              <a:t>2026/5/6</a:t>
+              <a:t>2026/5/7</a:t>
             </a:fld>
             <a:endParaRPr kumimoji="1" lang="ja-JP" altLang="en-US"/>
           </a:p>
@@ -5187,7 +5187,7 @@
           <a:p>
             <a:fld id="{61FE3999-FCFF-407F-9A7B-E154C26CB6C5}" type="datetimeFigureOut">
               <a:rPr kumimoji="1" lang="ja-JP" altLang="en-US" smtClean="0"/>
-              <a:t>2026/5/6</a:t>
+              <a:t>2026/5/7</a:t>
             </a:fld>
             <a:endParaRPr kumimoji="1" lang="ja-JP" altLang="en-US"/>
           </a:p>
@@ -5462,7 +5462,7 @@
           <a:p>
             <a:fld id="{61FE3999-FCFF-407F-9A7B-E154C26CB6C5}" type="datetimeFigureOut">
               <a:rPr kumimoji="1" lang="ja-JP" altLang="en-US" smtClean="0"/>
-              <a:t>2026/5/6</a:t>
+              <a:t>2026/5/7</a:t>
             </a:fld>
             <a:endParaRPr kumimoji="1" lang="ja-JP" altLang="en-US"/>
           </a:p>
@@ -5791,7 +5791,7 @@
           <a:p>
             <a:fld id="{61FE3999-FCFF-407F-9A7B-E154C26CB6C5}" type="datetimeFigureOut">
               <a:rPr kumimoji="1" lang="ja-JP" altLang="en-US" smtClean="0"/>
-              <a:t>2026/5/6</a:t>
+              <a:t>2026/5/7</a:t>
             </a:fld>
             <a:endParaRPr kumimoji="1" lang="ja-JP" altLang="en-US"/>
           </a:p>
@@ -6267,7 +6267,7 @@
           <a:p>
             <a:fld id="{61FE3999-FCFF-407F-9A7B-E154C26CB6C5}" type="datetimeFigureOut">
               <a:rPr kumimoji="1" lang="ja-JP" altLang="en-US" smtClean="0"/>
-              <a:t>2026/5/6</a:t>
+              <a:t>2026/5/7</a:t>
             </a:fld>
             <a:endParaRPr kumimoji="1" lang="ja-JP" altLang="en-US"/>
           </a:p>
@@ -6408,7 +6408,7 @@
           <a:p>
             <a:fld id="{61FE3999-FCFF-407F-9A7B-E154C26CB6C5}" type="datetimeFigureOut">
               <a:rPr kumimoji="1" lang="ja-JP" altLang="en-US" smtClean="0"/>
-              <a:t>2026/5/6</a:t>
+              <a:t>2026/5/7</a:t>
             </a:fld>
             <a:endParaRPr kumimoji="1" lang="ja-JP" altLang="en-US"/>
           </a:p>
@@ -6521,7 +6521,7 @@
           <a:p>
             <a:fld id="{61FE3999-FCFF-407F-9A7B-E154C26CB6C5}" type="datetimeFigureOut">
               <a:rPr kumimoji="1" lang="ja-JP" altLang="en-US" smtClean="0"/>
-              <a:t>2026/5/6</a:t>
+              <a:t>2026/5/7</a:t>
             </a:fld>
             <a:endParaRPr kumimoji="1" lang="ja-JP" altLang="en-US"/>
           </a:p>
@@ -6864,7 +6864,7 @@
           <a:p>
             <a:fld id="{61FE3999-FCFF-407F-9A7B-E154C26CB6C5}" type="datetimeFigureOut">
               <a:rPr kumimoji="1" lang="ja-JP" altLang="en-US" smtClean="0"/>
-              <a:t>2026/5/6</a:t>
+              <a:t>2026/5/7</a:t>
             </a:fld>
             <a:endParaRPr kumimoji="1" lang="ja-JP" altLang="en-US"/>
           </a:p>
@@ -7152,7 +7152,7 @@
           <a:p>
             <a:fld id="{61FE3999-FCFF-407F-9A7B-E154C26CB6C5}" type="datetimeFigureOut">
               <a:rPr kumimoji="1" lang="ja-JP" altLang="en-US" smtClean="0"/>
-              <a:t>2026/5/6</a:t>
+              <a:t>2026/5/7</a:t>
             </a:fld>
             <a:endParaRPr kumimoji="1" lang="ja-JP" altLang="en-US"/>
           </a:p>
@@ -7425,7 +7425,7 @@
           <a:p>
             <a:fld id="{61FE3999-FCFF-407F-9A7B-E154C26CB6C5}" type="datetimeFigureOut">
               <a:rPr kumimoji="1" lang="ja-JP" altLang="en-US" smtClean="0"/>
-              <a:t>2026/5/6</a:t>
+              <a:t>2026/5/7</a:t>
             </a:fld>
             <a:endParaRPr kumimoji="1" lang="ja-JP" altLang="en-US"/>
           </a:p>
@@ -9052,8 +9052,8 @@
           </p:sp>
         </mc:Fallback>
       </mc:AlternateContent>
-      <mc:AlternateContent xmlns:mc="http://schemas.openxmlformats.org/markup-compatibility/2006" xmlns:a14="http://schemas.microsoft.com/office/drawing/2010/main">
-        <mc:Choice Requires="a14">
+      <mc:AlternateContent xmlns:mc="http://schemas.openxmlformats.org/markup-compatibility/2006">
+        <mc:Choice xmlns:a14="http://schemas.microsoft.com/office/drawing/2010/main" Requires="a14">
           <p:sp>
             <p:nvSpPr>
               <p:cNvPr id="5" name="テキスト ボックス 4">
@@ -9069,7 +9069,7 @@
             <p:spPr>
               <a:xfrm>
                 <a:off x="7003690" y="925924"/>
-                <a:ext cx="3581558" cy="611962"/>
+                <a:ext cx="3685753" cy="622735"/>
               </a:xfrm>
               <a:prstGeom prst="rect">
                 <a:avLst/>
@@ -9121,10 +9121,10 @@
                       </m:num>
                       <m:den>
                         <m:r>
-                          <a:rPr kumimoji="1" lang="ja-JP" altLang="en-US" sz="1400" i="0" smtClean="0">
+                          <a:rPr kumimoji="1" lang="en-US" altLang="ja-JP" sz="1400" b="0" i="1" smtClean="0">
                             <a:latin typeface="Cambria Math" panose="02040503050406030204" pitchFamily="18" charset="0"/>
                           </a:rPr>
-                          <m:t>2</m:t>
+                          <m:t>3</m:t>
                         </m:r>
                       </m:den>
                     </m:f>
@@ -9145,7 +9145,7 @@
             </p:txBody>
           </p:sp>
         </mc:Choice>
-        <mc:Fallback xmlns="">
+        <mc:Fallback>
           <p:sp>
             <p:nvSpPr>
               <p:cNvPr id="5" name="テキスト ボックス 4">
@@ -9163,7 +9163,7 @@
             <p:spPr>
               <a:xfrm>
                 <a:off x="7003690" y="925924"/>
-                <a:ext cx="3581558" cy="611962"/>
+                <a:ext cx="3685753" cy="622735"/>
               </a:xfrm>
               <a:prstGeom prst="rect">
                 <a:avLst/>
@@ -9171,7 +9171,7 @@
               <a:blipFill>
                 <a:blip r:embed="rId5"/>
                 <a:stretch>
-                  <a:fillRect l="-511" t="-2000" b="-3000"/>
+                  <a:fillRect l="-496" t="-1961" b="-980"/>
                 </a:stretch>
               </a:blipFill>
             </p:spPr>
@@ -22564,8 +22564,8 @@
           </p:sp>
         </mc:Fallback>
       </mc:AlternateContent>
-      <mc:AlternateContent xmlns:mc="http://schemas.openxmlformats.org/markup-compatibility/2006" xmlns:a14="http://schemas.microsoft.com/office/drawing/2010/main">
-        <mc:Choice Requires="a14">
+      <mc:AlternateContent xmlns:mc="http://schemas.openxmlformats.org/markup-compatibility/2006">
+        <mc:Choice xmlns:a14="http://schemas.microsoft.com/office/drawing/2010/main" Requires="a14">
           <p:sp>
             <p:nvSpPr>
               <p:cNvPr id="5" name="テキスト ボックス 4">
@@ -22581,7 +22581,7 @@
             <p:spPr>
               <a:xfrm>
                 <a:off x="5322358" y="3960439"/>
-                <a:ext cx="1547283" cy="2278509"/>
+                <a:ext cx="1547283" cy="2011448"/>
               </a:xfrm>
               <a:prstGeom prst="rect">
                 <a:avLst/>
@@ -22700,56 +22700,14 @@
               <a:p>
                 <a:r>
                   <a:rPr kumimoji="1" lang="en-US" altLang="ja-JP" dirty="0"/>
-                  <a:t>tan45°= </a:t>
+                  <a:t>tan45°= 1</a:t>
                 </a:r>
-                <a14:m>
-                  <m:oMath xmlns:m="http://schemas.openxmlformats.org/officeDocument/2006/math">
-                    <m:f>
-                      <m:fPr>
-                        <m:ctrlPr>
-                          <a:rPr lang="en-US" altLang="ja-JP" sz="2400" i="1" dirty="0">
-                            <a:latin typeface="Cambria Math" panose="02040503050406030204" pitchFamily="18" charset="0"/>
-                          </a:rPr>
-                        </m:ctrlPr>
-                      </m:fPr>
-                      <m:num>
-                        <m:r>
-                          <a:rPr lang="en-US" altLang="ja-JP" sz="2400" dirty="0">
-                            <a:latin typeface="Cambria Math" panose="02040503050406030204" pitchFamily="18" charset="0"/>
-                          </a:rPr>
-                          <m:t>1</m:t>
-                        </m:r>
-                      </m:num>
-                      <m:den>
-                        <m:rad>
-                          <m:radPr>
-                            <m:degHide m:val="on"/>
-                            <m:ctrlPr>
-                              <a:rPr lang="en-US" altLang="ja-JP" sz="2400" i="1" dirty="0">
-                                <a:latin typeface="Cambria Math" panose="02040503050406030204" pitchFamily="18" charset="0"/>
-                              </a:rPr>
-                            </m:ctrlPr>
-                          </m:radPr>
-                          <m:deg/>
-                          <m:e>
-                            <m:r>
-                              <a:rPr lang="en-US" altLang="ja-JP" sz="2400" dirty="0">
-                                <a:latin typeface="Cambria Math" panose="02040503050406030204" pitchFamily="18" charset="0"/>
-                              </a:rPr>
-                              <m:t>2</m:t>
-                            </m:r>
-                          </m:e>
-                        </m:rad>
-                      </m:den>
-                    </m:f>
-                  </m:oMath>
-                </a14:m>
                 <a:endParaRPr kumimoji="1" lang="ja-JP" altLang="en-US" dirty="0"/>
               </a:p>
             </p:txBody>
           </p:sp>
         </mc:Choice>
-        <mc:Fallback xmlns="">
+        <mc:Fallback>
           <p:sp>
             <p:nvSpPr>
               <p:cNvPr id="5" name="テキスト ボックス 4">
@@ -22767,7 +22725,7 @@
             <p:spPr>
               <a:xfrm>
                 <a:off x="5322358" y="3960439"/>
-                <a:ext cx="1547283" cy="2278509"/>
+                <a:ext cx="1547283" cy="2011448"/>
               </a:xfrm>
               <a:prstGeom prst="rect">
                 <a:avLst/>
@@ -22775,7 +22733,7 @@
               <a:blipFill>
                 <a:blip r:embed="rId9"/>
                 <a:stretch>
-                  <a:fillRect l="-3150"/>
+                  <a:fillRect l="-3150" b="-3939"/>
                 </a:stretch>
               </a:blipFill>
             </p:spPr>
@@ -26495,7 +26453,7 @@
         <p:spPr>
           <a:xfrm>
             <a:off x="6324936" y="4991100"/>
-            <a:ext cx="5035353" cy="954107"/>
+            <a:ext cx="4381328" cy="954107"/>
           </a:xfrm>
           <a:prstGeom prst="rect">
             <a:avLst/>
@@ -26535,7 +26493,7 @@
             </a:r>
             <a:r>
               <a:rPr lang="en-US" altLang="ja-JP" sz="2800" b="1" dirty="0"/>
-              <a:t>3.14...</a:t>
+              <a:t>π</a:t>
             </a:r>
           </a:p>
           <a:p>
@@ -26553,7 +26511,7 @@
             </a:r>
             <a:r>
               <a:rPr lang="en-US" altLang="ja-JP" sz="2800" b="1" dirty="0"/>
-              <a:t>3.14...</a:t>
+              <a:t>π</a:t>
             </a:r>
             <a:endParaRPr kumimoji="1" lang="ja-JP" altLang="en-US" sz="2800" dirty="0"/>
           </a:p>

--- a/03.三角比/03_三角比.pptx
+++ b/03.三角比/03_三角比.pptx
@@ -927,7 +927,7 @@
           <inkml:channelProperty channel="F" name="resolution" value="0" units="1/dev"/>
         </inkml:channelProperties>
       </inkml:inkSource>
-      <inkml:timestamp xml:id="ts0" timeString="2026-05-05T20:27:13.187"/>
+      <inkml:timestamp xml:id="ts0" timeString="2026-05-05T18:27:05.316"/>
     </inkml:context>
     <inkml:brush xml:id="br0">
       <inkml:brushProperty name="width" value="0.035" units="cm"/>
@@ -935,7 +935,7 @@
       <inkml:brushProperty name="color" value="#E71224"/>
     </inkml:brush>
   </inkml:definitions>
-  <inkml:trace contextRef="#ctx0" brushRef="#br0">162 0 24575,'-13'16'0,"-1"0"0,-12 21 0,-9 10 0,27-35 0,-1 0 0,2 1 0,-1 0 0,2 0 0,0 0 0,0 1 0,2 0 0,-1 0 0,2 0 0,-4 26 0,3 9 0,4 94 0,2-57 0,-1-77 9,0 0 1,0-1-1,1 1 0,0-1 0,1 0 1,0 1-1,0-1 0,0 0 0,1 0 0,1-1 1,-1 1-1,10 10 0,5 6-504,2-1 0,27 24 0,-36-37-6331</inkml:trace>
+  <inkml:trace contextRef="#ctx0" brushRef="#br0">0 0 24575</inkml:trace>
 </inkml:ink>
 </file>
 
@@ -955,7 +955,7 @@
           <inkml:channelProperty channel="F" name="resolution" value="0" units="1/dev"/>
         </inkml:channelProperties>
       </inkml:inkSource>
-      <inkml:timestamp xml:id="ts0" timeString="2026-05-05T20:27:13.188"/>
+      <inkml:timestamp xml:id="ts0" timeString="2026-05-05T18:27:12.357"/>
     </inkml:context>
     <inkml:brush xml:id="br0">
       <inkml:brushProperty name="width" value="0.035" units="cm"/>
@@ -963,7 +963,7 @@
       <inkml:brushProperty name="color" value="#E71224"/>
     </inkml:brush>
   </inkml:definitions>
-  <inkml:trace contextRef="#ctx0" brushRef="#br0">410 128 24575,'1'-21'0,"0"14"0,-1-1 0,0 1 0,-1-1 0,-2-13 0,3 18 0,-1 1 0,0 0 0,0 0 0,0 0 0,0-1 0,0 1 0,-1 0 0,1 0 0,-1 1 0,1-1 0,-1 0 0,0 0 0,1 1 0,-1-1 0,0 1 0,0-1 0,0 1 0,0 0 0,-4-2 0,-4 0 0,0-1 0,-1 1 0,1 1 0,-1 0 0,0 0 0,-17 0 0,-67 6 0,89-4 0,0 0 0,0 1 0,0 0 0,0 0 0,0 1 0,0 0 0,0 0 0,0 0 0,1 1 0,-1-1 0,1 1 0,0 1 0,0-1 0,0 1 0,0 0 0,0 0 0,1 0 0,0 1 0,0-1 0,0 1 0,-5 8 0,0 1 0,1 0 0,0 0 0,1 1 0,1 0 0,0 1 0,1-1 0,-5 25 0,4 16 0,3 0 0,7 106 0,-3-153 0,0-1 0,0 1 0,1-1 0,0 0 0,1 1 0,0-1 0,0 0 0,1-1 0,0 1 0,0-1 0,1 1 0,10 11 0,-10-14 0,-1 0 0,1 0 0,0-1 0,1 0 0,-1 0 0,1-1 0,0 1 0,0-1 0,0 0 0,0-1 0,0 0 0,0 0 0,1 0 0,-1 0 0,1-1 0,12 1 0,-12-2 0,1 0 0,-1 0 0,0-1 0,1 0 0,-1 0 0,1 0 0,-1-1 0,0 0 0,0-1 0,0 1 0,0-1 0,-1-1 0,1 1 0,-1-1 0,0-1 0,0 1 0,0-1 0,0 0 0,-1 0 0,0 0 0,5-8 0,15-16 0,-7 10 0,26-40 0,-40 52 0,0 0 0,0 0 0,-1 0 0,0 0 0,0-1 0,-1 0 0,0 1 0,0-1 0,-1 0 0,1-10 0,-5-158-1365,3 161-5461</inkml:trace>
+  <inkml:trace contextRef="#ctx0" brushRef="#br0">0 3 24575,'0'-3'0</inkml:trace>
 </inkml:ink>
 </file>
 
@@ -983,7 +983,7 @@
           <inkml:channelProperty channel="F" name="resolution" value="0" units="1/dev"/>
         </inkml:channelProperties>
       </inkml:inkSource>
-      <inkml:timestamp xml:id="ts0" timeString="2026-05-05T20:27:13.189"/>
+      <inkml:timestamp xml:id="ts0" timeString="2026-05-05T18:27:23.603"/>
     </inkml:context>
     <inkml:brush xml:id="br0">
       <inkml:brushProperty name="width" value="0.035" units="cm"/>
@@ -991,7 +991,7 @@
       <inkml:brushProperty name="color" value="#E71224"/>
     </inkml:brush>
   </inkml:definitions>
-  <inkml:trace contextRef="#ctx0" brushRef="#br0">0 0 24575,'0'3'0,"3"1"0,4 0 0,7-1 0,4 0 0,2-2 0,3 0 0,2-1 0,-2 0 0,0 0 0,-3 0 0,0-1 0,-2 1 0,0 0 0,0 0 0,-1 0 0,-3 0-8191</inkml:trace>
+  <inkml:trace contextRef="#ctx0" brushRef="#br0">0 0 24575</inkml:trace>
 </inkml:ink>
 </file>
 
@@ -1011,7 +1011,7 @@
           <inkml:channelProperty channel="F" name="resolution" value="0" units="1/dev"/>
         </inkml:channelProperties>
       </inkml:inkSource>
-      <inkml:timestamp xml:id="ts0" timeString="2026-05-05T20:27:57.920"/>
+      <inkml:timestamp xml:id="ts0" timeString="2026-05-05T18:27:41.160"/>
     </inkml:context>
     <inkml:brush xml:id="br0">
       <inkml:brushProperty name="width" value="0.035" units="cm"/>
@@ -1019,63 +1019,7 @@
       <inkml:brushProperty name="color" value="#E71224"/>
     </inkml:brush>
   </inkml:definitions>
-  <inkml:trace contextRef="#ctx0" brushRef="#br0">162 0 24575,'-13'16'0,"-1"0"0,-12 21 0,-9 10 0,27-35 0,-1 0 0,2 1 0,-1 0 0,2 0 0,0 0 0,0 1 0,2 0 0,-1 0 0,2 0 0,-4 26 0,3 9 0,4 94 0,2-57 0,-1-77 9,0 0 1,0-1-1,1 1 0,0-1 0,1 0 1,0 1-1,0-1 0,0 0 0,1 0 0,1-1 1,-1 1-1,10 10 0,5 6-504,2-1 0,27 24 0,-36-37-6331</inkml:trace>
-</inkml:ink>
-</file>
-
-<file path=ppt/ink/ink128.xml><?xml version="1.0" encoding="utf-8"?>
-<inkml:ink xmlns:inkml="http://www.w3.org/2003/InkML">
-  <inkml:definitions>
-    <inkml:context xml:id="ctx0">
-      <inkml:inkSource xml:id="inkSrc0">
-        <inkml:traceFormat>
-          <inkml:channel name="X" type="integer" min="-2.14748E9" max="2.14748E9" units="cm"/>
-          <inkml:channel name="Y" type="integer" min="-2.14748E9" max="2.14748E9" units="cm"/>
-          <inkml:channel name="F" type="integer" max="32767" units="dev"/>
-        </inkml:traceFormat>
-        <inkml:channelProperties>
-          <inkml:channelProperty channel="X" name="resolution" value="1000" units="1/cm"/>
-          <inkml:channelProperty channel="Y" name="resolution" value="1000" units="1/cm"/>
-          <inkml:channelProperty channel="F" name="resolution" value="0" units="1/dev"/>
-        </inkml:channelProperties>
-      </inkml:inkSource>
-      <inkml:timestamp xml:id="ts0" timeString="2026-05-05T20:27:57.921"/>
-    </inkml:context>
-    <inkml:brush xml:id="br0">
-      <inkml:brushProperty name="width" value="0.035" units="cm"/>
-      <inkml:brushProperty name="height" value="0.035" units="cm"/>
-      <inkml:brushProperty name="color" value="#E71224"/>
-    </inkml:brush>
-  </inkml:definitions>
-  <inkml:trace contextRef="#ctx0" brushRef="#br0">410 128 24575,'1'-21'0,"0"14"0,-1-1 0,0 1 0,-1-1 0,-2-13 0,3 18 0,-1 1 0,0 0 0,0 0 0,0 0 0,0-1 0,0 1 0,-1 0 0,1 0 0,-1 1 0,1-1 0,-1 0 0,0 0 0,1 1 0,-1-1 0,0 1 0,0-1 0,0 1 0,0 0 0,-4-2 0,-4 0 0,0-1 0,-1 1 0,1 1 0,-1 0 0,0 0 0,-17 0 0,-67 6 0,89-4 0,0 0 0,0 1 0,0 0 0,0 0 0,0 1 0,0 0 0,0 0 0,0 0 0,1 1 0,-1-1 0,1 1 0,0 1 0,0-1 0,0 1 0,0 0 0,0 0 0,1 0 0,0 1 0,0-1 0,0 1 0,-5 8 0,0 1 0,1 0 0,0 0 0,1 1 0,1 0 0,0 1 0,1-1 0,-5 25 0,4 16 0,3 0 0,7 106 0,-3-153 0,0-1 0,0 1 0,1-1 0,0 0 0,1 1 0,0-1 0,0 0 0,1-1 0,0 1 0,0-1 0,1 1 0,10 11 0,-10-14 0,-1 0 0,1 0 0,0-1 0,1 0 0,-1 0 0,1-1 0,0 1 0,0-1 0,0 0 0,0-1 0,0 0 0,0 0 0,1 0 0,-1 0 0,1-1 0,12 1 0,-12-2 0,1 0 0,-1 0 0,0-1 0,1 0 0,-1 0 0,1 0 0,-1-1 0,0 0 0,0-1 0,0 1 0,0-1 0,-1-1 0,1 1 0,-1-1 0,0-1 0,0 1 0,0-1 0,0 0 0,-1 0 0,0 0 0,5-8 0,15-16 0,-7 10 0,26-40 0,-40 52 0,0 0 0,0 0 0,-1 0 0,0 0 0,0-1 0,-1 0 0,0 1 0,0-1 0,-1 0 0,1-10 0,-5-158-1365,3 161-5461</inkml:trace>
-</inkml:ink>
-</file>
-
-<file path=ppt/ink/ink129.xml><?xml version="1.0" encoding="utf-8"?>
-<inkml:ink xmlns:inkml="http://www.w3.org/2003/InkML">
-  <inkml:definitions>
-    <inkml:context xml:id="ctx0">
-      <inkml:inkSource xml:id="inkSrc0">
-        <inkml:traceFormat>
-          <inkml:channel name="X" type="integer" min="-2.14748E9" max="2.14748E9" units="cm"/>
-          <inkml:channel name="Y" type="integer" min="-2.14748E9" max="2.14748E9" units="cm"/>
-          <inkml:channel name="F" type="integer" max="32767" units="dev"/>
-        </inkml:traceFormat>
-        <inkml:channelProperties>
-          <inkml:channelProperty channel="X" name="resolution" value="1000" units="1/cm"/>
-          <inkml:channelProperty channel="Y" name="resolution" value="1000" units="1/cm"/>
-          <inkml:channelProperty channel="F" name="resolution" value="0" units="1/dev"/>
-        </inkml:channelProperties>
-      </inkml:inkSource>
-      <inkml:timestamp xml:id="ts0" timeString="2026-05-05T20:27:57.922"/>
-    </inkml:context>
-    <inkml:brush xml:id="br0">
-      <inkml:brushProperty name="width" value="0.035" units="cm"/>
-      <inkml:brushProperty name="height" value="0.035" units="cm"/>
-      <inkml:brushProperty name="color" value="#E71224"/>
-    </inkml:brush>
-  </inkml:definitions>
-  <inkml:trace contextRef="#ctx0" brushRef="#br0">0 0 24575,'0'3'0,"3"1"0,4 0 0,7-1 0,4 0 0,2-2 0,3 0 0,2-1 0,-2 0 0,0 0 0,-3 0 0,0-1 0,-2 1 0,0 0 0,0 0 0,-1 0 0,-3 0-8191</inkml:trace>
+  <inkml:trace contextRef="#ctx0" brushRef="#br0">0 0 24575</inkml:trace>
 </inkml:ink>
 </file>
 
@@ -1104,118 +1048,6 @@
     </inkml:brush>
   </inkml:definitions>
   <inkml:trace contextRef="#ctx0" brushRef="#br0">135 0 24575,'-2'1'0,"1"0"0,-1 0 0,0 1 0,0-1 0,0 0 0,1 1 0,-1-1 0,1 1 0,-1 0 0,1-1 0,0 1 0,-1 0 0,1 0 0,0 0 0,0 0 0,1 0 0,-2 2 0,-1 3 0,-8 10 0,-1-1 0,0 1 0,-18 17 0,1-2 0,28-31 0,0 0 0,0 0 0,0 1 0,0-1 0,0 0 0,1 0 0,-1 0 0,0 1 0,0-1 0,1 0 0,-1 1 0,1-1 0,-1 0 0,1 1 0,0-1 0,0 1 0,0-1 0,-1 0 0,1 1 0,0-1 0,1 1 0,-1-1 0,0 1 0,1 1 0,0-1 0,0-1 0,0 1 0,1-1 0,-1 0 0,0 1 0,1-1 0,-1 0 0,1 0 0,-1 0 0,1 0 0,0 0 0,-1 0 0,1-1 0,0 1 0,0-1 0,0 1 0,-1-1 0,4 1 0,26 3-43,0-2 0,0 0 0,38-5 0,-25 2-1150,-25 1-5633</inkml:trace>
-</inkml:ink>
-</file>
-
-<file path=ppt/ink/ink130.xml><?xml version="1.0" encoding="utf-8"?>
-<inkml:ink xmlns:inkml="http://www.w3.org/2003/InkML">
-  <inkml:definitions>
-    <inkml:context xml:id="ctx0">
-      <inkml:inkSource xml:id="inkSrc0">
-        <inkml:traceFormat>
-          <inkml:channel name="X" type="integer" min="-2.14748E9" max="2.14748E9" units="cm"/>
-          <inkml:channel name="Y" type="integer" min="-2.14748E9" max="2.14748E9" units="cm"/>
-          <inkml:channel name="F" type="integer" max="32767" units="dev"/>
-        </inkml:traceFormat>
-        <inkml:channelProperties>
-          <inkml:channelProperty channel="X" name="resolution" value="1000" units="1/cm"/>
-          <inkml:channelProperty channel="Y" name="resolution" value="1000" units="1/cm"/>
-          <inkml:channelProperty channel="F" name="resolution" value="0" units="1/dev"/>
-        </inkml:channelProperties>
-      </inkml:inkSource>
-      <inkml:timestamp xml:id="ts0" timeString="2026-05-05T18:27:05.316"/>
-    </inkml:context>
-    <inkml:brush xml:id="br0">
-      <inkml:brushProperty name="width" value="0.035" units="cm"/>
-      <inkml:brushProperty name="height" value="0.035" units="cm"/>
-      <inkml:brushProperty name="color" value="#E71224"/>
-    </inkml:brush>
-  </inkml:definitions>
-  <inkml:trace contextRef="#ctx0" brushRef="#br0">0 0 24575</inkml:trace>
-</inkml:ink>
-</file>
-
-<file path=ppt/ink/ink131.xml><?xml version="1.0" encoding="utf-8"?>
-<inkml:ink xmlns:inkml="http://www.w3.org/2003/InkML">
-  <inkml:definitions>
-    <inkml:context xml:id="ctx0">
-      <inkml:inkSource xml:id="inkSrc0">
-        <inkml:traceFormat>
-          <inkml:channel name="X" type="integer" min="-2.14748E9" max="2.14748E9" units="cm"/>
-          <inkml:channel name="Y" type="integer" min="-2.14748E9" max="2.14748E9" units="cm"/>
-          <inkml:channel name="F" type="integer" max="32767" units="dev"/>
-        </inkml:traceFormat>
-        <inkml:channelProperties>
-          <inkml:channelProperty channel="X" name="resolution" value="1000" units="1/cm"/>
-          <inkml:channelProperty channel="Y" name="resolution" value="1000" units="1/cm"/>
-          <inkml:channelProperty channel="F" name="resolution" value="0" units="1/dev"/>
-        </inkml:channelProperties>
-      </inkml:inkSource>
-      <inkml:timestamp xml:id="ts0" timeString="2026-05-05T18:27:12.357"/>
-    </inkml:context>
-    <inkml:brush xml:id="br0">
-      <inkml:brushProperty name="width" value="0.035" units="cm"/>
-      <inkml:brushProperty name="height" value="0.035" units="cm"/>
-      <inkml:brushProperty name="color" value="#E71224"/>
-    </inkml:brush>
-  </inkml:definitions>
-  <inkml:trace contextRef="#ctx0" brushRef="#br0">0 3 24575,'0'-3'0</inkml:trace>
-</inkml:ink>
-</file>
-
-<file path=ppt/ink/ink132.xml><?xml version="1.0" encoding="utf-8"?>
-<inkml:ink xmlns:inkml="http://www.w3.org/2003/InkML">
-  <inkml:definitions>
-    <inkml:context xml:id="ctx0">
-      <inkml:inkSource xml:id="inkSrc0">
-        <inkml:traceFormat>
-          <inkml:channel name="X" type="integer" min="-2.14748E9" max="2.14748E9" units="cm"/>
-          <inkml:channel name="Y" type="integer" min="-2.14748E9" max="2.14748E9" units="cm"/>
-          <inkml:channel name="F" type="integer" max="32767" units="dev"/>
-        </inkml:traceFormat>
-        <inkml:channelProperties>
-          <inkml:channelProperty channel="X" name="resolution" value="1000" units="1/cm"/>
-          <inkml:channelProperty channel="Y" name="resolution" value="1000" units="1/cm"/>
-          <inkml:channelProperty channel="F" name="resolution" value="0" units="1/dev"/>
-        </inkml:channelProperties>
-      </inkml:inkSource>
-      <inkml:timestamp xml:id="ts0" timeString="2026-05-05T18:27:23.603"/>
-    </inkml:context>
-    <inkml:brush xml:id="br0">
-      <inkml:brushProperty name="width" value="0.035" units="cm"/>
-      <inkml:brushProperty name="height" value="0.035" units="cm"/>
-      <inkml:brushProperty name="color" value="#E71224"/>
-    </inkml:brush>
-  </inkml:definitions>
-  <inkml:trace contextRef="#ctx0" brushRef="#br0">0 0 24575</inkml:trace>
-</inkml:ink>
-</file>
-
-<file path=ppt/ink/ink133.xml><?xml version="1.0" encoding="utf-8"?>
-<inkml:ink xmlns:inkml="http://www.w3.org/2003/InkML">
-  <inkml:definitions>
-    <inkml:context xml:id="ctx0">
-      <inkml:inkSource xml:id="inkSrc0">
-        <inkml:traceFormat>
-          <inkml:channel name="X" type="integer" min="-2.14748E9" max="2.14748E9" units="cm"/>
-          <inkml:channel name="Y" type="integer" min="-2.14748E9" max="2.14748E9" units="cm"/>
-          <inkml:channel name="F" type="integer" max="32767" units="dev"/>
-        </inkml:traceFormat>
-        <inkml:channelProperties>
-          <inkml:channelProperty channel="X" name="resolution" value="1000" units="1/cm"/>
-          <inkml:channelProperty channel="Y" name="resolution" value="1000" units="1/cm"/>
-          <inkml:channelProperty channel="F" name="resolution" value="0" units="1/dev"/>
-        </inkml:channelProperties>
-      </inkml:inkSource>
-      <inkml:timestamp xml:id="ts0" timeString="2026-05-05T18:27:41.160"/>
-    </inkml:context>
-    <inkml:brush xml:id="br0">
-      <inkml:brushProperty name="width" value="0.035" units="cm"/>
-      <inkml:brushProperty name="height" value="0.035" units="cm"/>
-      <inkml:brushProperty name="color" value="#E71224"/>
-    </inkml:brush>
-  </inkml:definitions>
-  <inkml:trace contextRef="#ctx0" brushRef="#br0">0 0 24575</inkml:trace>
 </inkml:ink>
 </file>
 
@@ -9338,180 +9170,6 @@
           </p:sp>
         </mc:Fallback>
       </mc:AlternateContent>
-      <mc:AlternateContent xmlns:mc="http://schemas.openxmlformats.org/markup-compatibility/2006" xmlns:p14="http://schemas.microsoft.com/office/powerpoint/2010/main">
-        <mc:Choice Requires="p14">
-          <p:contentPart p14:bwMode="auto" r:id="rId7">
-            <p14:nvContentPartPr>
-              <p14:cNvPr id="9" name="インク 8">
-                <a:extLst>
-                  <a:ext uri="{FF2B5EF4-FFF2-40B4-BE49-F238E27FC236}">
-                    <a16:creationId xmlns:a16="http://schemas.microsoft.com/office/drawing/2014/main" id="{DBD23511-D667-DE65-BCBA-C3A5695FF681}"/>
-                  </a:ext>
-                </a:extLst>
-              </p14:cNvPr>
-              <p14:cNvContentPartPr/>
-              <p14:nvPr/>
-            </p14:nvContentPartPr>
-            <p14:xfrm>
-              <a:off x="9023978" y="2733798"/>
-              <a:ext cx="58320" cy="283680"/>
-            </p14:xfrm>
-          </p:contentPart>
-        </mc:Choice>
-        <mc:Fallback xmlns="">
-          <p:pic>
-            <p:nvPicPr>
-              <p:cNvPr id="9" name="インク 8">
-                <a:extLst>
-                  <a:ext uri="{FF2B5EF4-FFF2-40B4-BE49-F238E27FC236}">
-                    <a16:creationId xmlns:a16="http://schemas.microsoft.com/office/drawing/2014/main" id="{DBD23511-D667-DE65-BCBA-C3A5695FF681}"/>
-                  </a:ext>
-                </a:extLst>
-              </p:cNvPr>
-              <p:cNvPicPr/>
-              <p:nvPr/>
-            </p:nvPicPr>
-            <p:blipFill>
-              <a:blip r:embed="rId8"/>
-              <a:stretch>
-                <a:fillRect/>
-              </a:stretch>
-            </p:blipFill>
-            <p:spPr>
-              <a:xfrm>
-                <a:off x="9017858" y="2727678"/>
-                <a:ext cx="70560" cy="295920"/>
-              </a:xfrm>
-              <a:prstGeom prst="rect">
-                <a:avLst/>
-              </a:prstGeom>
-            </p:spPr>
-          </p:pic>
-        </mc:Fallback>
-      </mc:AlternateContent>
-      <p:grpSp>
-        <p:nvGrpSpPr>
-          <p:cNvPr id="10" name="グループ化 9">
-            <a:extLst>
-              <a:ext uri="{FF2B5EF4-FFF2-40B4-BE49-F238E27FC236}">
-                <a16:creationId xmlns:a16="http://schemas.microsoft.com/office/drawing/2014/main" id="{AA429AAA-E2B7-3795-1F8D-E482114B1170}"/>
-              </a:ext>
-            </a:extLst>
-          </p:cNvPr>
-          <p:cNvGrpSpPr/>
-          <p:nvPr/>
-        </p:nvGrpSpPr>
-        <p:grpSpPr>
-          <a:xfrm>
-            <a:off x="8331338" y="2599158"/>
-            <a:ext cx="155160" cy="237600"/>
-            <a:chOff x="7885020" y="5586500"/>
-            <a:chExt cx="155160" cy="237600"/>
-          </a:xfrm>
-        </p:grpSpPr>
-        <mc:AlternateContent xmlns:mc="http://schemas.openxmlformats.org/markup-compatibility/2006" xmlns:p14="http://schemas.microsoft.com/office/powerpoint/2010/main">
-          <mc:Choice Requires="p14">
-            <p:contentPart p14:bwMode="auto" r:id="rId9">
-              <p14:nvContentPartPr>
-                <p14:cNvPr id="11" name="インク 10">
-                  <a:extLst>
-                    <a:ext uri="{FF2B5EF4-FFF2-40B4-BE49-F238E27FC236}">
-                      <a16:creationId xmlns:a16="http://schemas.microsoft.com/office/drawing/2014/main" id="{1FD7DD37-A6B8-05CC-0163-7951EF11D537}"/>
-                    </a:ext>
-                  </a:extLst>
-                </p14:cNvPr>
-                <p14:cNvContentPartPr/>
-                <p14:nvPr/>
-              </p14:nvContentPartPr>
-              <p14:xfrm>
-                <a:off x="7885020" y="5586500"/>
-                <a:ext cx="155160" cy="237600"/>
-              </p14:xfrm>
-            </p:contentPart>
-          </mc:Choice>
-          <mc:Fallback xmlns="">
-            <p:pic>
-              <p:nvPicPr>
-                <p:cNvPr id="175" name="インク 174">
-                  <a:extLst>
-                    <a:ext uri="{FF2B5EF4-FFF2-40B4-BE49-F238E27FC236}">
-                      <a16:creationId xmlns:a16="http://schemas.microsoft.com/office/drawing/2014/main" id="{4799A36D-41E3-AB31-396F-72EFCAC88DD6}"/>
-                    </a:ext>
-                  </a:extLst>
-                </p:cNvPr>
-                <p:cNvPicPr/>
-                <p:nvPr/>
-              </p:nvPicPr>
-              <p:blipFill>
-                <a:blip r:embed="rId65"/>
-                <a:stretch>
-                  <a:fillRect/>
-                </a:stretch>
-              </p:blipFill>
-              <p:spPr>
-                <a:xfrm>
-                  <a:off x="7878900" y="5580380"/>
-                  <a:ext cx="167400" cy="249840"/>
-                </a:xfrm>
-                <a:prstGeom prst="rect">
-                  <a:avLst/>
-                </a:prstGeom>
-              </p:spPr>
-            </p:pic>
-          </mc:Fallback>
-        </mc:AlternateContent>
-        <mc:AlternateContent xmlns:mc="http://schemas.openxmlformats.org/markup-compatibility/2006" xmlns:p14="http://schemas.microsoft.com/office/powerpoint/2010/main">
-          <mc:Choice Requires="p14">
-            <p:contentPart p14:bwMode="auto" r:id="rId66">
-              <p14:nvContentPartPr>
-                <p14:cNvPr id="12" name="インク 11">
-                  <a:extLst>
-                    <a:ext uri="{FF2B5EF4-FFF2-40B4-BE49-F238E27FC236}">
-                      <a16:creationId xmlns:a16="http://schemas.microsoft.com/office/drawing/2014/main" id="{956A52D1-93A4-3C16-96EB-3F45451F9C9D}"/>
-                    </a:ext>
-                  </a:extLst>
-                </p14:cNvPr>
-                <p14:cNvContentPartPr/>
-                <p14:nvPr/>
-              </p14:nvContentPartPr>
-              <p14:xfrm>
-                <a:off x="7905540" y="5727620"/>
-                <a:ext cx="101520" cy="7200"/>
-              </p14:xfrm>
-            </p:contentPart>
-          </mc:Choice>
-          <mc:Fallback xmlns="">
-            <p:pic>
-              <p:nvPicPr>
-                <p:cNvPr id="176" name="インク 175">
-                  <a:extLst>
-                    <a:ext uri="{FF2B5EF4-FFF2-40B4-BE49-F238E27FC236}">
-                      <a16:creationId xmlns:a16="http://schemas.microsoft.com/office/drawing/2014/main" id="{9B43D526-87E1-4C20-CEA7-61EFC1AC0A63}"/>
-                    </a:ext>
-                  </a:extLst>
-                </p:cNvPr>
-                <p:cNvPicPr/>
-                <p:nvPr/>
-              </p:nvPicPr>
-              <p:blipFill>
-                <a:blip r:embed="rId67"/>
-                <a:stretch>
-                  <a:fillRect/>
-                </a:stretch>
-              </p:blipFill>
-              <p:spPr>
-                <a:xfrm>
-                  <a:off x="7899420" y="5721500"/>
-                  <a:ext cx="113760" cy="19440"/>
-                </a:xfrm>
-                <a:prstGeom prst="rect">
-                  <a:avLst/>
-                </a:prstGeom>
-              </p:spPr>
-            </p:pic>
-          </mc:Fallback>
-        </mc:AlternateContent>
-      </p:grpSp>
       <mc:AlternateContent xmlns:mc="http://schemas.openxmlformats.org/markup-compatibility/2006" xmlns:a14="http://schemas.microsoft.com/office/drawing/2010/main">
         <mc:Choice Requires="a14">
           <p:sp>
@@ -9802,180 +9460,6 @@
           </p:sp>
         </mc:Fallback>
       </mc:AlternateContent>
-      <mc:AlternateContent xmlns:mc="http://schemas.openxmlformats.org/markup-compatibility/2006" xmlns:p14="http://schemas.microsoft.com/office/powerpoint/2010/main">
-        <mc:Choice Requires="p14">
-          <p:contentPart p14:bwMode="auto" r:id="rId70">
-            <p14:nvContentPartPr>
-              <p14:cNvPr id="16" name="インク 15">
-                <a:extLst>
-                  <a:ext uri="{FF2B5EF4-FFF2-40B4-BE49-F238E27FC236}">
-                    <a16:creationId xmlns:a16="http://schemas.microsoft.com/office/drawing/2014/main" id="{94895CDD-CBDB-DC24-14D0-68E17D75D64A}"/>
-                  </a:ext>
-                </a:extLst>
-              </p14:cNvPr>
-              <p14:cNvContentPartPr/>
-              <p14:nvPr/>
-            </p14:nvContentPartPr>
-            <p14:xfrm>
-              <a:off x="9167942" y="5617008"/>
-              <a:ext cx="58320" cy="283680"/>
-            </p14:xfrm>
-          </p:contentPart>
-        </mc:Choice>
-        <mc:Fallback xmlns="">
-          <p:pic>
-            <p:nvPicPr>
-              <p:cNvPr id="16" name="インク 15">
-                <a:extLst>
-                  <a:ext uri="{FF2B5EF4-FFF2-40B4-BE49-F238E27FC236}">
-                    <a16:creationId xmlns:a16="http://schemas.microsoft.com/office/drawing/2014/main" id="{94895CDD-CBDB-DC24-14D0-68E17D75D64A}"/>
-                  </a:ext>
-                </a:extLst>
-              </p:cNvPr>
-              <p:cNvPicPr/>
-              <p:nvPr/>
-            </p:nvPicPr>
-            <p:blipFill>
-              <a:blip r:embed="rId8"/>
-              <a:stretch>
-                <a:fillRect/>
-              </a:stretch>
-            </p:blipFill>
-            <p:spPr>
-              <a:xfrm>
-                <a:off x="9161822" y="5610888"/>
-                <a:ext cx="70560" cy="295920"/>
-              </a:xfrm>
-              <a:prstGeom prst="rect">
-                <a:avLst/>
-              </a:prstGeom>
-            </p:spPr>
-          </p:pic>
-        </mc:Fallback>
-      </mc:AlternateContent>
-      <p:grpSp>
-        <p:nvGrpSpPr>
-          <p:cNvPr id="17" name="グループ化 16">
-            <a:extLst>
-              <a:ext uri="{FF2B5EF4-FFF2-40B4-BE49-F238E27FC236}">
-                <a16:creationId xmlns:a16="http://schemas.microsoft.com/office/drawing/2014/main" id="{B6C45FA7-CD73-2E3B-7171-0CE68E890AC7}"/>
-              </a:ext>
-            </a:extLst>
-          </p:cNvPr>
-          <p:cNvGrpSpPr/>
-          <p:nvPr/>
-        </p:nvGrpSpPr>
-        <p:grpSpPr>
-          <a:xfrm>
-            <a:off x="8475302" y="5482368"/>
-            <a:ext cx="155160" cy="237600"/>
-            <a:chOff x="7885020" y="5586500"/>
-            <a:chExt cx="155160" cy="237600"/>
-          </a:xfrm>
-        </p:grpSpPr>
-        <mc:AlternateContent xmlns:mc="http://schemas.openxmlformats.org/markup-compatibility/2006" xmlns:p14="http://schemas.microsoft.com/office/powerpoint/2010/main">
-          <mc:Choice Requires="p14">
-            <p:contentPart p14:bwMode="auto" r:id="rId71">
-              <p14:nvContentPartPr>
-                <p14:cNvPr id="18" name="インク 17">
-                  <a:extLst>
-                    <a:ext uri="{FF2B5EF4-FFF2-40B4-BE49-F238E27FC236}">
-                      <a16:creationId xmlns:a16="http://schemas.microsoft.com/office/drawing/2014/main" id="{91D60C1F-1852-538E-961D-0A79DEAEF9FE}"/>
-                    </a:ext>
-                  </a:extLst>
-                </p14:cNvPr>
-                <p14:cNvContentPartPr/>
-                <p14:nvPr/>
-              </p14:nvContentPartPr>
-              <p14:xfrm>
-                <a:off x="7885020" y="5586500"/>
-                <a:ext cx="155160" cy="237600"/>
-              </p14:xfrm>
-            </p:contentPart>
-          </mc:Choice>
-          <mc:Fallback xmlns="">
-            <p:pic>
-              <p:nvPicPr>
-                <p:cNvPr id="175" name="インク 174">
-                  <a:extLst>
-                    <a:ext uri="{FF2B5EF4-FFF2-40B4-BE49-F238E27FC236}">
-                      <a16:creationId xmlns:a16="http://schemas.microsoft.com/office/drawing/2014/main" id="{4799A36D-41E3-AB31-396F-72EFCAC88DD6}"/>
-                    </a:ext>
-                  </a:extLst>
-                </p:cNvPr>
-                <p:cNvPicPr/>
-                <p:nvPr/>
-              </p:nvPicPr>
-              <p:blipFill>
-                <a:blip r:embed="rId65"/>
-                <a:stretch>
-                  <a:fillRect/>
-                </a:stretch>
-              </p:blipFill>
-              <p:spPr>
-                <a:xfrm>
-                  <a:off x="7878900" y="5580380"/>
-                  <a:ext cx="167400" cy="249840"/>
-                </a:xfrm>
-                <a:prstGeom prst="rect">
-                  <a:avLst/>
-                </a:prstGeom>
-              </p:spPr>
-            </p:pic>
-          </mc:Fallback>
-        </mc:AlternateContent>
-        <mc:AlternateContent xmlns:mc="http://schemas.openxmlformats.org/markup-compatibility/2006" xmlns:p14="http://schemas.microsoft.com/office/powerpoint/2010/main">
-          <mc:Choice Requires="p14">
-            <p:contentPart p14:bwMode="auto" r:id="rId72">
-              <p14:nvContentPartPr>
-                <p14:cNvPr id="19" name="インク 18">
-                  <a:extLst>
-                    <a:ext uri="{FF2B5EF4-FFF2-40B4-BE49-F238E27FC236}">
-                      <a16:creationId xmlns:a16="http://schemas.microsoft.com/office/drawing/2014/main" id="{299585F8-47D3-2722-65FE-BCD0F3159DF0}"/>
-                    </a:ext>
-                  </a:extLst>
-                </p14:cNvPr>
-                <p14:cNvContentPartPr/>
-                <p14:nvPr/>
-              </p14:nvContentPartPr>
-              <p14:xfrm>
-                <a:off x="7905540" y="5727620"/>
-                <a:ext cx="101520" cy="7200"/>
-              </p14:xfrm>
-            </p:contentPart>
-          </mc:Choice>
-          <mc:Fallback xmlns="">
-            <p:pic>
-              <p:nvPicPr>
-                <p:cNvPr id="176" name="インク 175">
-                  <a:extLst>
-                    <a:ext uri="{FF2B5EF4-FFF2-40B4-BE49-F238E27FC236}">
-                      <a16:creationId xmlns:a16="http://schemas.microsoft.com/office/drawing/2014/main" id="{9B43D526-87E1-4C20-CEA7-61EFC1AC0A63}"/>
-                    </a:ext>
-                  </a:extLst>
-                </p:cNvPr>
-                <p:cNvPicPr/>
-                <p:nvPr/>
-              </p:nvPicPr>
-              <p:blipFill>
-                <a:blip r:embed="rId67"/>
-                <a:stretch>
-                  <a:fillRect/>
-                </a:stretch>
-              </p:blipFill>
-              <p:spPr>
-                <a:xfrm>
-                  <a:off x="7899420" y="5721500"/>
-                  <a:ext cx="113760" cy="19440"/>
-                </a:xfrm>
-                <a:prstGeom prst="rect">
-                  <a:avLst/>
-                </a:prstGeom>
-              </p:spPr>
-            </p:pic>
-          </mc:Fallback>
-        </mc:AlternateContent>
-      </p:grpSp>
       <p:sp>
         <p:nvSpPr>
           <p:cNvPr id="24" name="テキスト ボックス 23">
